--- a/shiori-thumbnail/out/shiori_thumb_B.pptx
+++ b/shiori-thumbnail/out/shiori_thumb_B.pptx
@@ -3230,7 +3230,7 @@
               </a:lnSpc>
             </a:pPr>
             <a:r>
-              <a:rPr sz="1800" spc="525">
+              <a:rPr sz="1800" b="0" spc="525">
                 <a:solidFill>
                   <a:srgbClr val="C98B3E"/>
                 </a:solidFill>
@@ -3271,7 +3271,7 @@
               </a:lnSpc>
             </a:pPr>
             <a:r>
-              <a:rPr sz="6000" spc="150">
+              <a:rPr sz="6000" b="0" spc="150">
                 <a:solidFill>
                   <a:srgbClr val="3A2A20"/>
                 </a:solidFill>
@@ -3289,7 +3289,7 @@
               </a:lnSpc>
             </a:pPr>
             <a:r>
-              <a:rPr sz="6000" spc="150">
+              <a:rPr sz="6000" b="0" spc="150">
                 <a:solidFill>
                   <a:srgbClr val="3A2A20"/>
                 </a:solidFill>
@@ -3400,7 +3400,7 @@
               </a:lnSpc>
             </a:pPr>
             <a:r>
-              <a:rPr sz="1800" spc="375">
+              <a:rPr sz="1800" b="0" spc="375">
                 <a:solidFill>
                   <a:srgbClr val="3A2A20"/>
                 </a:solidFill>
